--- a/CAD/CAD_Lec_01.pptx
+++ b/CAD/CAD_Lec_01.pptx
@@ -188,6 +188,13 @@
             <a:schemeClr val="lt1"/>
           </a:fontRef>
         </p:style>
+        <p:txBody>
+          <a:bodyPr/>
+          <a:lstStyle/>
+          <a:p>
+            <a:endParaRPr lang="en-US"/>
+          </a:p>
+        </p:txBody>
       </p:sp>
       <p:sp>
         <p:nvSpPr>
@@ -226,6 +233,13 @@
             <a:schemeClr val="lt1"/>
           </a:fontRef>
         </p:style>
+        <p:txBody>
+          <a:bodyPr/>
+          <a:lstStyle/>
+          <a:p>
+            <a:endParaRPr lang="en-US"/>
+          </a:p>
+        </p:txBody>
       </p:sp>
       <p:sp>
         <p:nvSpPr>
@@ -360,7 +374,7 @@
           <a:p>
             <a:fld id="{9066139C-FA37-4E42-B935-DD55AE1389D5}" type="datetimeFigureOut">
               <a:rPr lang="en-US" smtClean="0"/>
-              <a:t>10/17/2022</a:t>
+              <a:t>9/20/2025</a:t>
             </a:fld>
             <a:endParaRPr lang="en-US"/>
           </a:p>
@@ -568,7 +582,7 @@
           <a:p>
             <a:fld id="{9066139C-FA37-4E42-B935-DD55AE1389D5}" type="datetimeFigureOut">
               <a:rPr lang="en-US" smtClean="0"/>
-              <a:t>10/17/2022</a:t>
+              <a:t>9/20/2025</a:t>
             </a:fld>
             <a:endParaRPr lang="en-US"/>
           </a:p>
@@ -824,7 +838,7 @@
           <a:p>
             <a:fld id="{9066139C-FA37-4E42-B935-DD55AE1389D5}" type="datetimeFigureOut">
               <a:rPr lang="en-US" smtClean="0"/>
-              <a:t>10/17/2022</a:t>
+              <a:t>9/20/2025</a:t>
             </a:fld>
             <a:endParaRPr lang="en-US"/>
           </a:p>
@@ -998,7 +1012,7 @@
           <a:p>
             <a:fld id="{9066139C-FA37-4E42-B935-DD55AE1389D5}" type="datetimeFigureOut">
               <a:rPr lang="en-US" smtClean="0"/>
-              <a:t>10/17/2022</a:t>
+              <a:t>9/20/2025</a:t>
             </a:fld>
             <a:endParaRPr lang="en-US"/>
           </a:p>
@@ -1341,7 +1355,7 @@
           <a:p>
             <a:fld id="{9066139C-FA37-4E42-B935-DD55AE1389D5}" type="datetimeFigureOut">
               <a:rPr lang="en-US" smtClean="0"/>
-              <a:t>10/17/2022</a:t>
+              <a:t>9/20/2025</a:t>
             </a:fld>
             <a:endParaRPr lang="en-US"/>
           </a:p>
@@ -1616,7 +1630,7 @@
           <a:p>
             <a:fld id="{9066139C-FA37-4E42-B935-DD55AE1389D5}" type="datetimeFigureOut">
               <a:rPr lang="en-US" smtClean="0"/>
-              <a:t>10/17/2022</a:t>
+              <a:t>9/20/2025</a:t>
             </a:fld>
             <a:endParaRPr lang="en-US"/>
           </a:p>
@@ -1995,7 +2009,7 @@
           <a:p>
             <a:fld id="{9066139C-FA37-4E42-B935-DD55AE1389D5}" type="datetimeFigureOut">
               <a:rPr lang="en-US" smtClean="0"/>
-              <a:t>10/17/2022</a:t>
+              <a:t>9/20/2025</a:t>
             </a:fld>
             <a:endParaRPr lang="en-US"/>
           </a:p>
@@ -2113,7 +2127,7 @@
           <a:p>
             <a:fld id="{9066139C-FA37-4E42-B935-DD55AE1389D5}" type="datetimeFigureOut">
               <a:rPr lang="en-US" smtClean="0"/>
-              <a:t>10/17/2022</a:t>
+              <a:t>9/20/2025</a:t>
             </a:fld>
             <a:endParaRPr lang="en-US"/>
           </a:p>
@@ -2284,7 +2298,7 @@
           <a:p>
             <a:fld id="{9066139C-FA37-4E42-B935-DD55AE1389D5}" type="datetimeFigureOut">
               <a:rPr lang="en-US" smtClean="0"/>
-              <a:t>10/17/2022</a:t>
+              <a:t>9/20/2025</a:t>
             </a:fld>
             <a:endParaRPr lang="en-US"/>
           </a:p>
@@ -2638,7 +2652,7 @@
           <a:p>
             <a:fld id="{9066139C-FA37-4E42-B935-DD55AE1389D5}" type="datetimeFigureOut">
               <a:rPr lang="en-US" smtClean="0"/>
-              <a:t>10/17/2022</a:t>
+              <a:t>9/20/2025</a:t>
             </a:fld>
             <a:endParaRPr lang="en-US"/>
           </a:p>
@@ -3020,7 +3034,7 @@
           <a:p>
             <a:fld id="{9066139C-FA37-4E42-B935-DD55AE1389D5}" type="datetimeFigureOut">
               <a:rPr lang="en-US" smtClean="0"/>
-              <a:t>10/17/2022</a:t>
+              <a:t>9/20/2025</a:t>
             </a:fld>
             <a:endParaRPr lang="en-US"/>
           </a:p>
@@ -3140,6 +3154,13 @@
             <a:schemeClr val="lt1"/>
           </a:fontRef>
         </p:style>
+        <p:txBody>
+          <a:bodyPr/>
+          <a:lstStyle/>
+          <a:p>
+            <a:endParaRPr lang="en-US"/>
+          </a:p>
+        </p:txBody>
       </p:sp>
       <p:sp>
         <p:nvSpPr>
@@ -3178,6 +3199,13 @@
             <a:schemeClr val="lt1"/>
           </a:fontRef>
         </p:style>
+        <p:txBody>
+          <a:bodyPr/>
+          <a:lstStyle/>
+          <a:p>
+            <a:endParaRPr lang="en-US"/>
+          </a:p>
+        </p:txBody>
       </p:sp>
       <p:sp>
         <p:nvSpPr>
@@ -3307,7 +3335,7 @@
           <a:p>
             <a:fld id="{9066139C-FA37-4E42-B935-DD55AE1389D5}" type="datetimeFigureOut">
               <a:rPr lang="en-US" smtClean="0"/>
-              <a:t>10/17/2022</a:t>
+              <a:t>9/20/2025</a:t>
             </a:fld>
             <a:endParaRPr lang="en-US"/>
           </a:p>
@@ -3856,11 +3884,18 @@
           <a:p>
             <a:pPr algn="ctr"/>
             <a:r>
+              <a:rPr lang="en-US" sz="5400">
+                <a:latin typeface="Arial" panose="020B0604020202020204" pitchFamily="34" charset="0"/>
+                <a:cs typeface="Arial" panose="020B0604020202020204" pitchFamily="34" charset="0"/>
+              </a:rPr>
+              <a:t>Computer </a:t>
+            </a:r>
+            <a:r>
               <a:rPr lang="en-US" sz="5400" dirty="0">
                 <a:latin typeface="Arial" panose="020B0604020202020204" pitchFamily="34" charset="0"/>
                 <a:cs typeface="Arial" panose="020B0604020202020204" pitchFamily="34" charset="0"/>
               </a:rPr>
-              <a:t>Commuter Aided Design</a:t>
+              <a:t>Aided Design</a:t>
             </a:r>
             <a:br>
               <a:rPr lang="en-US" sz="5400" dirty="0">
@@ -4670,7 +4705,47 @@
                 <a:effectLst/>
                 <a:latin typeface="Arial" panose="020B0604020202020204" pitchFamily="34" charset="0"/>
               </a:rPr>
-              <a:t>Tree is a connected subgraph of a given graph, which contains all the nodes of a graph.</a:t>
+              <a:t>Tree is a </a:t>
+            </a:r>
+            <a:r>
+              <a:rPr lang="en-US" sz="1800" i="0" dirty="0">
+                <a:solidFill>
+                  <a:srgbClr val="000000"/>
+                </a:solidFill>
+                <a:effectLst/>
+                <a:latin typeface="Arial" panose="020B0604020202020204" pitchFamily="34" charset="0"/>
+              </a:rPr>
+              <a:t>connected</a:t>
+            </a:r>
+            <a:r>
+              <a:rPr lang="en-US" sz="1800" b="0" i="0" dirty="0">
+                <a:solidFill>
+                  <a:srgbClr val="000000"/>
+                </a:solidFill>
+                <a:effectLst/>
+                <a:latin typeface="Arial" panose="020B0604020202020204" pitchFamily="34" charset="0"/>
+              </a:rPr>
+              <a:t> subgraph of a given graph, which </a:t>
+            </a:r>
+            <a:r>
+              <a:rPr lang="en-US" sz="1800" i="0" dirty="0">
+                <a:solidFill>
+                  <a:srgbClr val="000000"/>
+                </a:solidFill>
+                <a:effectLst/>
+                <a:latin typeface="Arial" panose="020B0604020202020204" pitchFamily="34" charset="0"/>
+              </a:rPr>
+              <a:t>contains all </a:t>
+            </a:r>
+            <a:r>
+              <a:rPr lang="en-US" sz="1800" b="0" i="0" dirty="0">
+                <a:solidFill>
+                  <a:srgbClr val="000000"/>
+                </a:solidFill>
+                <a:effectLst/>
+                <a:latin typeface="Arial" panose="020B0604020202020204" pitchFamily="34" charset="0"/>
+              </a:rPr>
+              <a:t>the nodes of a graph.</a:t>
             </a:r>
           </a:p>
           <a:p>
@@ -4792,25 +4867,7 @@
                 <a:effectLst/>
                 <a:latin typeface="Arial" panose="020B0604020202020204" pitchFamily="34" charset="0"/>
               </a:rPr>
-              <a:t>Any branch of the graph not belonging</a:t>
-            </a:r>
-          </a:p>
-          <a:p>
-            <a:pPr marL="0" indent="0" algn="just">
-              <a:lnSpc>
-                <a:spcPct val="100000"/>
-              </a:lnSpc>
-              <a:buNone/>
-            </a:pPr>
-            <a:r>
-              <a:rPr lang="en-US" sz="1800" b="0" i="0" dirty="0">
-                <a:solidFill>
-                  <a:srgbClr val="000000"/>
-                </a:solidFill>
-                <a:effectLst/>
-                <a:latin typeface="Arial" panose="020B0604020202020204" pitchFamily="34" charset="0"/>
-              </a:rPr>
-              <a:t>to the tree</a:t>
+              <a:t>Any branch of the graph not belonging to the tree</a:t>
             </a:r>
             <a:r>
               <a:rPr lang="en-US" sz="1800" dirty="0">
@@ -4820,23 +4877,6 @@
                 <a:latin typeface="Arial" panose="020B0604020202020204" pitchFamily="34" charset="0"/>
               </a:rPr>
               <a:t> </a:t>
-            </a:r>
-          </a:p>
-          <a:p>
-            <a:pPr marL="0" indent="0" algn="just">
-              <a:lnSpc>
-                <a:spcPct val="100000"/>
-              </a:lnSpc>
-              <a:buNone/>
-            </a:pPr>
-            <a:r>
-              <a:rPr lang="en-US" sz="1800" dirty="0">
-                <a:solidFill>
-                  <a:srgbClr val="000000"/>
-                </a:solidFill>
-                <a:latin typeface="Arial" panose="020B0604020202020204" pitchFamily="34" charset="0"/>
-              </a:rPr>
-              <a:t>Number of tree branches  = N</a:t>
             </a:r>
           </a:p>
           <a:p>
@@ -6292,6 +6332,16 @@
               </a:rPr>
               <a:t>the number of f-loops will be equal to the number of links.</a:t>
             </a:r>
+            <a:r>
+              <a:rPr lang="en-US" sz="6600" b="0" i="0" dirty="0">
+                <a:solidFill>
+                  <a:srgbClr val="000000"/>
+                </a:solidFill>
+                <a:effectLst/>
+                <a:latin typeface="Verdana" panose="020B0604030504040204" pitchFamily="34" charset="0"/>
+              </a:rPr>
+              <a:t> This matrix gives the relation between branch currents and link currents.</a:t>
+            </a:r>
             <a:endParaRPr lang="en-US" sz="7200" dirty="0">
               <a:solidFill>
                 <a:srgbClr val="000000"/>
@@ -6878,7 +6928,7 @@
         </p:blipFill>
         <p:spPr>
           <a:xfrm>
-            <a:off x="2324100" y="2002730"/>
+            <a:off x="2618740" y="1744406"/>
             <a:ext cx="8401050" cy="2467769"/>
           </a:xfrm>
         </p:spPr>
@@ -7103,16 +7153,7 @@
                                     <a:ea typeface="Calibri" panose="020F0502020204030204" pitchFamily="34" charset="0"/>
                                     <a:cs typeface="Times New Roman" panose="02020603050405020304" pitchFamily="18" charset="0"/>
                                   </a:rPr>
-                                  <m:t>−</m:t>
-                                </m:r>
-                                <m:r>
-                                  <a:rPr lang="en-US" sz="2400" i="1">
-                                    <a:effectLst/>
-                                    <a:latin typeface="Cambria Math" panose="02040503050406030204" pitchFamily="18" charset="0"/>
-                                    <a:ea typeface="Calibri" panose="020F0502020204030204" pitchFamily="34" charset="0"/>
-                                    <a:cs typeface="Times New Roman" panose="02020603050405020304" pitchFamily="18" charset="0"/>
-                                  </a:rPr>
-                                  <m:t>1</m:t>
+                                  <m:t>−1</m:t>
                                 </m:r>
                               </m:e>
                               <m:e>
@@ -7128,22 +7169,13 @@
                               </m:e>
                               <m:e>
                                 <m:r>
-                                  <a:rPr lang="en-US" sz="2400" i="1">
+                                  <a:rPr lang="en-US" sz="2400" i="1" smtClean="0">
                                     <a:effectLst/>
                                     <a:latin typeface="Cambria Math" panose="02040503050406030204" pitchFamily="18" charset="0"/>
                                     <a:ea typeface="Calibri" panose="020F0502020204030204" pitchFamily="34" charset="0"/>
                                     <a:cs typeface="Times New Roman" panose="02020603050405020304" pitchFamily="18" charset="0"/>
                                   </a:rPr>
-                                  <m:t>−</m:t>
-                                </m:r>
-                                <m:r>
-                                  <a:rPr lang="en-US" sz="2400" i="1">
-                                    <a:effectLst/>
-                                    <a:latin typeface="Cambria Math" panose="02040503050406030204" pitchFamily="18" charset="0"/>
-                                    <a:ea typeface="Calibri" panose="020F0502020204030204" pitchFamily="34" charset="0"/>
-                                    <a:cs typeface="Times New Roman" panose="02020603050405020304" pitchFamily="18" charset="0"/>
-                                  </a:rPr>
-                                  <m:t>1</m:t>
+                                  <m:t>−1</m:t>
                                 </m:r>
                               </m:e>
                               <m:e>
@@ -7268,16 +7300,7 @@
                                     <a:ea typeface="Calibri" panose="020F0502020204030204" pitchFamily="34" charset="0"/>
                                     <a:cs typeface="Times New Roman" panose="02020603050405020304" pitchFamily="18" charset="0"/>
                                   </a:rPr>
-                                  <m:t>−</m:t>
-                                </m:r>
-                                <m:r>
-                                  <a:rPr lang="en-US" sz="2400" i="1">
-                                    <a:effectLst/>
-                                    <a:latin typeface="Cambria Math" panose="02040503050406030204" pitchFamily="18" charset="0"/>
-                                    <a:ea typeface="Calibri" panose="020F0502020204030204" pitchFamily="34" charset="0"/>
-                                    <a:cs typeface="Times New Roman" panose="02020603050405020304" pitchFamily="18" charset="0"/>
-                                  </a:rPr>
-                                  <m:t>1</m:t>
+                                  <m:t>−1</m:t>
                                 </m:r>
                               </m:e>
                               <m:e>
@@ -7386,6 +7409,258 @@
           </p:sp>
         </mc:Fallback>
       </mc:AlternateContent>
+      <p:graphicFrame>
+        <p:nvGraphicFramePr>
+          <p:cNvPr id="3" name="Table 2">
+            <a:extLst>
+              <a:ext uri="{FF2B5EF4-FFF2-40B4-BE49-F238E27FC236}">
+                <a16:creationId xmlns:a16="http://schemas.microsoft.com/office/drawing/2014/main" id="{FBC129DC-C557-4976-DD74-D5B36BA200EF}"/>
+              </a:ext>
+            </a:extLst>
+          </p:cNvPr>
+          <p:cNvGraphicFramePr>
+            <a:graphicFrameLocks noGrp="1"/>
+          </p:cNvGraphicFramePr>
+          <p:nvPr>
+            <p:extLst>
+              <p:ext uri="{D42A27DB-BD31-4B8C-83A1-F6EECF244321}">
+                <p14:modId xmlns:p14="http://schemas.microsoft.com/office/powerpoint/2010/main" val="977523829"/>
+              </p:ext>
+            </p:extLst>
+          </p:nvPr>
+        </p:nvGraphicFramePr>
+        <p:xfrm>
+          <a:off x="3789680" y="4735869"/>
+          <a:ext cx="3342642" cy="370840"/>
+        </p:xfrm>
+        <a:graphic>
+          <a:graphicData uri="http://schemas.openxmlformats.org/drawingml/2006/table">
+            <a:tbl>
+              <a:tblPr firstRow="1" bandRow="1">
+                <a:tableStyleId>{2D5ABB26-0587-4C30-8999-92F81FD0307C}</a:tableStyleId>
+              </a:tblPr>
+              <a:tblGrid>
+                <a:gridCol w="557107">
+                  <a:extLst>
+                    <a:ext uri="{9D8B030D-6E8A-4147-A177-3AD203B41FA5}">
+                      <a16:colId xmlns:a16="http://schemas.microsoft.com/office/drawing/2014/main" val="2391621866"/>
+                    </a:ext>
+                  </a:extLst>
+                </a:gridCol>
+                <a:gridCol w="557107">
+                  <a:extLst>
+                    <a:ext uri="{9D8B030D-6E8A-4147-A177-3AD203B41FA5}">
+                      <a16:colId xmlns:a16="http://schemas.microsoft.com/office/drawing/2014/main" val="3758056444"/>
+                    </a:ext>
+                  </a:extLst>
+                </a:gridCol>
+                <a:gridCol w="673946">
+                  <a:extLst>
+                    <a:ext uri="{9D8B030D-6E8A-4147-A177-3AD203B41FA5}">
+                      <a16:colId xmlns:a16="http://schemas.microsoft.com/office/drawing/2014/main" val="2335364567"/>
+                    </a:ext>
+                  </a:extLst>
+                </a:gridCol>
+                <a:gridCol w="599440">
+                  <a:extLst>
+                    <a:ext uri="{9D8B030D-6E8A-4147-A177-3AD203B41FA5}">
+                      <a16:colId xmlns:a16="http://schemas.microsoft.com/office/drawing/2014/main" val="1525507668"/>
+                    </a:ext>
+                  </a:extLst>
+                </a:gridCol>
+                <a:gridCol w="487680">
+                  <a:extLst>
+                    <a:ext uri="{9D8B030D-6E8A-4147-A177-3AD203B41FA5}">
+                      <a16:colId xmlns:a16="http://schemas.microsoft.com/office/drawing/2014/main" val="1972806100"/>
+                    </a:ext>
+                  </a:extLst>
+                </a:gridCol>
+                <a:gridCol w="467362">
+                  <a:extLst>
+                    <a:ext uri="{9D8B030D-6E8A-4147-A177-3AD203B41FA5}">
+                      <a16:colId xmlns:a16="http://schemas.microsoft.com/office/drawing/2014/main" val="1048435712"/>
+                    </a:ext>
+                  </a:extLst>
+                </a:gridCol>
+              </a:tblGrid>
+              <a:tr h="370840">
+                <a:tc>
+                  <a:txBody>
+                    <a:bodyPr/>
+                    <a:lstStyle/>
+                    <a:p>
+                      <a:pPr algn="r"/>
+                      <a:r>
+                        <a:rPr lang="en-US" dirty="0"/>
+                        <a:t>d</a:t>
+                      </a:r>
+                    </a:p>
+                  </a:txBody>
+                  <a:tcPr anchor="b"/>
+                </a:tc>
+                <a:tc>
+                  <a:txBody>
+                    <a:bodyPr/>
+                    <a:lstStyle/>
+                    <a:p>
+                      <a:pPr algn="r"/>
+                      <a:r>
+                        <a:rPr lang="en-US" dirty="0"/>
+                        <a:t>e</a:t>
+                      </a:r>
+                    </a:p>
+                  </a:txBody>
+                  <a:tcPr anchor="b"/>
+                </a:tc>
+                <a:tc>
+                  <a:txBody>
+                    <a:bodyPr/>
+                    <a:lstStyle/>
+                    <a:p>
+                      <a:pPr algn="r"/>
+                      <a:r>
+                        <a:rPr lang="en-US" dirty="0"/>
+                        <a:t>f</a:t>
+                      </a:r>
+                    </a:p>
+                  </a:txBody>
+                  <a:tcPr anchor="b"/>
+                </a:tc>
+                <a:tc>
+                  <a:txBody>
+                    <a:bodyPr/>
+                    <a:lstStyle/>
+                    <a:p>
+                      <a:pPr algn="r"/>
+                      <a:r>
+                        <a:rPr lang="en-US" dirty="0"/>
+                        <a:t>a</a:t>
+                      </a:r>
+                    </a:p>
+                  </a:txBody>
+                  <a:tcPr anchor="b"/>
+                </a:tc>
+                <a:tc>
+                  <a:txBody>
+                    <a:bodyPr/>
+                    <a:lstStyle/>
+                    <a:p>
+                      <a:pPr algn="r"/>
+                      <a:r>
+                        <a:rPr lang="en-US" dirty="0"/>
+                        <a:t>b</a:t>
+                      </a:r>
+                    </a:p>
+                  </a:txBody>
+                  <a:tcPr anchor="b"/>
+                </a:tc>
+                <a:tc>
+                  <a:txBody>
+                    <a:bodyPr/>
+                    <a:lstStyle/>
+                    <a:p>
+                      <a:pPr algn="r"/>
+                      <a:r>
+                        <a:rPr lang="en-US" dirty="0"/>
+                        <a:t>c</a:t>
+                      </a:r>
+                    </a:p>
+                  </a:txBody>
+                  <a:tcPr anchor="b"/>
+                </a:tc>
+                <a:extLst>
+                  <a:ext uri="{0D108BD9-81ED-4DB2-BD59-A6C34878D82A}">
+                    <a16:rowId xmlns:a16="http://schemas.microsoft.com/office/drawing/2014/main" val="413563610"/>
+                  </a:ext>
+                </a:extLst>
+              </a:tr>
+            </a:tbl>
+          </a:graphicData>
+        </a:graphic>
+      </p:graphicFrame>
+      <p:sp>
+        <p:nvSpPr>
+          <p:cNvPr id="4" name="Left Brace 3">
+            <a:extLst>
+              <a:ext uri="{FF2B5EF4-FFF2-40B4-BE49-F238E27FC236}">
+                <a16:creationId xmlns:a16="http://schemas.microsoft.com/office/drawing/2014/main" id="{E609A741-EB00-EA50-2CC5-5344B118D458}"/>
+              </a:ext>
+            </a:extLst>
+          </p:cNvPr>
+          <p:cNvSpPr/>
+          <p:nvPr/>
+        </p:nvSpPr>
+        <p:spPr>
+          <a:xfrm rot="5400000">
+            <a:off x="6385456" y="4151566"/>
+            <a:ext cx="213567" cy="1076960"/>
+          </a:xfrm>
+          <a:prstGeom prst="leftBrace">
+            <a:avLst/>
+          </a:prstGeom>
+        </p:spPr>
+        <p:style>
+          <a:lnRef idx="1">
+            <a:schemeClr val="dk1"/>
+          </a:lnRef>
+          <a:fillRef idx="0">
+            <a:schemeClr val="dk1"/>
+          </a:fillRef>
+          <a:effectRef idx="0">
+            <a:schemeClr val="dk1"/>
+          </a:effectRef>
+          <a:fontRef idx="minor">
+            <a:schemeClr val="tx1"/>
+          </a:fontRef>
+        </p:style>
+        <p:txBody>
+          <a:bodyPr rtlCol="0" anchor="ctr"/>
+          <a:lstStyle/>
+          <a:p>
+            <a:pPr algn="ctr"/>
+            <a:endParaRPr lang="en-US" dirty="0">
+              <a:highlight>
+                <a:srgbClr val="000000"/>
+              </a:highlight>
+            </a:endParaRPr>
+          </a:p>
+        </p:txBody>
+      </p:sp>
+      <p:sp>
+        <p:nvSpPr>
+          <p:cNvPr id="5" name="TextBox 4">
+            <a:extLst>
+              <a:ext uri="{FF2B5EF4-FFF2-40B4-BE49-F238E27FC236}">
+                <a16:creationId xmlns:a16="http://schemas.microsoft.com/office/drawing/2014/main" id="{5B4AFA5F-C037-C5A3-2306-B2A1D707FD95}"/>
+              </a:ext>
+            </a:extLst>
+          </p:cNvPr>
+          <p:cNvSpPr txBox="1"/>
+          <p:nvPr/>
+        </p:nvSpPr>
+        <p:spPr>
+          <a:xfrm>
+            <a:off x="5963922" y="4321308"/>
+            <a:ext cx="1168400" cy="307777"/>
+          </a:xfrm>
+          <a:prstGeom prst="rect">
+            <a:avLst/>
+          </a:prstGeom>
+          <a:noFill/>
+        </p:spPr>
+        <p:txBody>
+          <a:bodyPr wrap="square" rtlCol="0">
+            <a:spAutoFit/>
+          </a:bodyPr>
+          <a:lstStyle/>
+          <a:p>
+            <a:r>
+              <a:rPr lang="en-US" sz="1400" dirty="0"/>
+              <a:t>Unit matrix</a:t>
+            </a:r>
+          </a:p>
+        </p:txBody>
+      </p:sp>
     </p:spTree>
     <p:extLst>
       <p:ext uri="{BB962C8B-B14F-4D97-AF65-F5344CB8AC3E}">
@@ -7562,8 +7837,25 @@
                 <a:effectLst/>
                 <a:latin typeface="Arial" panose="020B0604020202020204" pitchFamily="34" charset="0"/>
               </a:rPr>
-              <a:t> and one or more links. So, the number of f-cut sets will be equal to the number of branches.</a:t>
-            </a:r>
+              <a:t> and one or more links. So, the number of f-cut sets will be equal to the number of branches. </a:t>
+            </a:r>
+            <a:r>
+              <a:rPr lang="en-US" sz="6600" b="0" i="0">
+                <a:solidFill>
+                  <a:srgbClr val="000000"/>
+                </a:solidFill>
+                <a:effectLst/>
+                <a:latin typeface="Verdana" panose="020B0604030504040204" pitchFamily="34" charset="0"/>
+              </a:rPr>
+              <a:t>This matrix gives the relation between branch voltages and twig voltages.</a:t>
+            </a:r>
+            <a:endParaRPr lang="en-US" sz="7200" b="0" i="0" dirty="0">
+              <a:solidFill>
+                <a:srgbClr val="000000"/>
+              </a:solidFill>
+              <a:effectLst/>
+              <a:latin typeface="Arial" panose="020B0604020202020204" pitchFamily="34" charset="0"/>
+            </a:endParaRPr>
           </a:p>
           <a:p>
             <a:pPr algn="just">
@@ -7627,7 +7919,7 @@
                 <a:effectLst/>
                 <a:latin typeface="Arial" panose="020B0604020202020204" pitchFamily="34" charset="0"/>
               </a:rPr>
-              <a:t>The value of element will be +1 for the branch of selected f-cut set.</a:t>
+              <a:t>The value of element will be +1 for the link of selected f-cut set.</a:t>
             </a:r>
           </a:p>
           <a:p>
@@ -8183,13 +8475,7 @@
                                   <a:rPr lang="en-US" sz="2400" i="0">
                                     <a:latin typeface="Cambria Math" panose="02040503050406030204" pitchFamily="18" charset="0"/>
                                   </a:rPr>
-                                  <m:t>−</m:t>
-                                </m:r>
-                                <m:r>
-                                  <a:rPr lang="en-US" sz="2400" i="0">
-                                    <a:latin typeface="Cambria Math" panose="02040503050406030204" pitchFamily="18" charset="0"/>
-                                  </a:rPr>
-                                  <m:t>1</m:t>
+                                  <m:t>−1</m:t>
                                 </m:r>
                               </m:e>
                               <m:e>
@@ -8239,13 +8525,7 @@
                                   <a:rPr lang="en-US" sz="2400" i="0">
                                     <a:latin typeface="Cambria Math" panose="02040503050406030204" pitchFamily="18" charset="0"/>
                                   </a:rPr>
-                                  <m:t>−</m:t>
-                                </m:r>
-                                <m:r>
-                                  <a:rPr lang="en-US" sz="2400" i="0">
-                                    <a:latin typeface="Cambria Math" panose="02040503050406030204" pitchFamily="18" charset="0"/>
-                                  </a:rPr>
-                                  <m:t>1</m:t>
+                                  <m:t>−1</m:t>
                                 </m:r>
                               </m:e>
                               <m:e>
@@ -8303,13 +8583,7 @@
                                   <a:rPr lang="en-US" sz="2400" i="0">
                                     <a:latin typeface="Cambria Math" panose="02040503050406030204" pitchFamily="18" charset="0"/>
                                   </a:rPr>
-                                  <m:t>−</m:t>
-                                </m:r>
-                                <m:r>
-                                  <a:rPr lang="en-US" sz="2400" i="0">
-                                    <a:latin typeface="Cambria Math" panose="02040503050406030204" pitchFamily="18" charset="0"/>
-                                  </a:rPr>
-                                  <m:t>1</m:t>
+                                  <m:t>−1</m:t>
                                 </m:r>
                               </m:e>
                             </m:mr>
@@ -8369,6 +8643,258 @@
           </p:sp>
         </mc:Fallback>
       </mc:AlternateContent>
+      <p:graphicFrame>
+        <p:nvGraphicFramePr>
+          <p:cNvPr id="3" name="Table 2">
+            <a:extLst>
+              <a:ext uri="{FF2B5EF4-FFF2-40B4-BE49-F238E27FC236}">
+                <a16:creationId xmlns:a16="http://schemas.microsoft.com/office/drawing/2014/main" id="{FBA0CA96-DD0B-3817-0727-4C6A39980E07}"/>
+              </a:ext>
+            </a:extLst>
+          </p:cNvPr>
+          <p:cNvGraphicFramePr>
+            <a:graphicFrameLocks noGrp="1"/>
+          </p:cNvGraphicFramePr>
+          <p:nvPr>
+            <p:extLst>
+              <p:ext uri="{D42A27DB-BD31-4B8C-83A1-F6EECF244321}">
+                <p14:modId xmlns:p14="http://schemas.microsoft.com/office/powerpoint/2010/main" val="652011615"/>
+              </p:ext>
+            </p:extLst>
+          </p:nvPr>
+        </p:nvGraphicFramePr>
+        <p:xfrm>
+          <a:off x="3789680" y="4735869"/>
+          <a:ext cx="3342642" cy="370840"/>
+        </p:xfrm>
+        <a:graphic>
+          <a:graphicData uri="http://schemas.openxmlformats.org/drawingml/2006/table">
+            <a:tbl>
+              <a:tblPr firstRow="1" bandRow="1">
+                <a:tableStyleId>{2D5ABB26-0587-4C30-8999-92F81FD0307C}</a:tableStyleId>
+              </a:tblPr>
+              <a:tblGrid>
+                <a:gridCol w="599440">
+                  <a:extLst>
+                    <a:ext uri="{9D8B030D-6E8A-4147-A177-3AD203B41FA5}">
+                      <a16:colId xmlns:a16="http://schemas.microsoft.com/office/drawing/2014/main" val="2391621866"/>
+                    </a:ext>
+                  </a:extLst>
+                </a:gridCol>
+                <a:gridCol w="514774">
+                  <a:extLst>
+                    <a:ext uri="{9D8B030D-6E8A-4147-A177-3AD203B41FA5}">
+                      <a16:colId xmlns:a16="http://schemas.microsoft.com/office/drawing/2014/main" val="3758056444"/>
+                    </a:ext>
+                  </a:extLst>
+                </a:gridCol>
+                <a:gridCol w="572346">
+                  <a:extLst>
+                    <a:ext uri="{9D8B030D-6E8A-4147-A177-3AD203B41FA5}">
+                      <a16:colId xmlns:a16="http://schemas.microsoft.com/office/drawing/2014/main" val="2335364567"/>
+                    </a:ext>
+                  </a:extLst>
+                </a:gridCol>
+                <a:gridCol w="416560">
+                  <a:extLst>
+                    <a:ext uri="{9D8B030D-6E8A-4147-A177-3AD203B41FA5}">
+                      <a16:colId xmlns:a16="http://schemas.microsoft.com/office/drawing/2014/main" val="1525507668"/>
+                    </a:ext>
+                  </a:extLst>
+                </a:gridCol>
+                <a:gridCol w="772160">
+                  <a:extLst>
+                    <a:ext uri="{9D8B030D-6E8A-4147-A177-3AD203B41FA5}">
+                      <a16:colId xmlns:a16="http://schemas.microsoft.com/office/drawing/2014/main" val="1972806100"/>
+                    </a:ext>
+                  </a:extLst>
+                </a:gridCol>
+                <a:gridCol w="467362">
+                  <a:extLst>
+                    <a:ext uri="{9D8B030D-6E8A-4147-A177-3AD203B41FA5}">
+                      <a16:colId xmlns:a16="http://schemas.microsoft.com/office/drawing/2014/main" val="1048435712"/>
+                    </a:ext>
+                  </a:extLst>
+                </a:gridCol>
+              </a:tblGrid>
+              <a:tr h="370840">
+                <a:tc>
+                  <a:txBody>
+                    <a:bodyPr/>
+                    <a:lstStyle/>
+                    <a:p>
+                      <a:pPr algn="ctr"/>
+                      <a:r>
+                        <a:rPr lang="en-US" dirty="0"/>
+                        <a:t>d</a:t>
+                      </a:r>
+                    </a:p>
+                  </a:txBody>
+                  <a:tcPr/>
+                </a:tc>
+                <a:tc>
+                  <a:txBody>
+                    <a:bodyPr/>
+                    <a:lstStyle/>
+                    <a:p>
+                      <a:pPr algn="ctr"/>
+                      <a:r>
+                        <a:rPr lang="en-US" dirty="0"/>
+                        <a:t>e</a:t>
+                      </a:r>
+                    </a:p>
+                  </a:txBody>
+                  <a:tcPr/>
+                </a:tc>
+                <a:tc>
+                  <a:txBody>
+                    <a:bodyPr/>
+                    <a:lstStyle/>
+                    <a:p>
+                      <a:pPr algn="ctr"/>
+                      <a:r>
+                        <a:rPr lang="en-US" dirty="0"/>
+                        <a:t>f</a:t>
+                      </a:r>
+                    </a:p>
+                  </a:txBody>
+                  <a:tcPr/>
+                </a:tc>
+                <a:tc>
+                  <a:txBody>
+                    <a:bodyPr/>
+                    <a:lstStyle/>
+                    <a:p>
+                      <a:pPr algn="ctr"/>
+                      <a:r>
+                        <a:rPr lang="en-US" dirty="0"/>
+                        <a:t>a</a:t>
+                      </a:r>
+                    </a:p>
+                  </a:txBody>
+                  <a:tcPr/>
+                </a:tc>
+                <a:tc>
+                  <a:txBody>
+                    <a:bodyPr/>
+                    <a:lstStyle/>
+                    <a:p>
+                      <a:pPr algn="ctr"/>
+                      <a:r>
+                        <a:rPr lang="en-US" dirty="0"/>
+                        <a:t>b</a:t>
+                      </a:r>
+                    </a:p>
+                  </a:txBody>
+                  <a:tcPr/>
+                </a:tc>
+                <a:tc>
+                  <a:txBody>
+                    <a:bodyPr/>
+                    <a:lstStyle/>
+                    <a:p>
+                      <a:pPr algn="ctr"/>
+                      <a:r>
+                        <a:rPr lang="en-US" dirty="0"/>
+                        <a:t>c</a:t>
+                      </a:r>
+                    </a:p>
+                  </a:txBody>
+                  <a:tcPr/>
+                </a:tc>
+                <a:extLst>
+                  <a:ext uri="{0D108BD9-81ED-4DB2-BD59-A6C34878D82A}">
+                    <a16:rowId xmlns:a16="http://schemas.microsoft.com/office/drawing/2014/main" val="413563610"/>
+                  </a:ext>
+                </a:extLst>
+              </a:tr>
+            </a:tbl>
+          </a:graphicData>
+        </a:graphic>
+      </p:graphicFrame>
+      <p:sp>
+        <p:nvSpPr>
+          <p:cNvPr id="4" name="Left Brace 3">
+            <a:extLst>
+              <a:ext uri="{FF2B5EF4-FFF2-40B4-BE49-F238E27FC236}">
+                <a16:creationId xmlns:a16="http://schemas.microsoft.com/office/drawing/2014/main" id="{A4AFE7A4-E9A3-C2A6-856C-271D7E7143DC}"/>
+              </a:ext>
+            </a:extLst>
+          </p:cNvPr>
+          <p:cNvSpPr/>
+          <p:nvPr/>
+        </p:nvSpPr>
+        <p:spPr>
+          <a:xfrm rot="5400000">
+            <a:off x="4536336" y="4137584"/>
+            <a:ext cx="213567" cy="1076960"/>
+          </a:xfrm>
+          <a:prstGeom prst="leftBrace">
+            <a:avLst/>
+          </a:prstGeom>
+        </p:spPr>
+        <p:style>
+          <a:lnRef idx="1">
+            <a:schemeClr val="dk1"/>
+          </a:lnRef>
+          <a:fillRef idx="0">
+            <a:schemeClr val="dk1"/>
+          </a:fillRef>
+          <a:effectRef idx="0">
+            <a:schemeClr val="dk1"/>
+          </a:effectRef>
+          <a:fontRef idx="minor">
+            <a:schemeClr val="tx1"/>
+          </a:fontRef>
+        </p:style>
+        <p:txBody>
+          <a:bodyPr rtlCol="0" anchor="ctr"/>
+          <a:lstStyle/>
+          <a:p>
+            <a:pPr algn="ctr"/>
+            <a:endParaRPr lang="en-US" dirty="0">
+              <a:highlight>
+                <a:srgbClr val="000000"/>
+              </a:highlight>
+            </a:endParaRPr>
+          </a:p>
+        </p:txBody>
+      </p:sp>
+      <p:sp>
+        <p:nvSpPr>
+          <p:cNvPr id="5" name="TextBox 4">
+            <a:extLst>
+              <a:ext uri="{FF2B5EF4-FFF2-40B4-BE49-F238E27FC236}">
+                <a16:creationId xmlns:a16="http://schemas.microsoft.com/office/drawing/2014/main" id="{1CC7807A-78EA-49F7-9A0F-16D3D832F8B4}"/>
+              </a:ext>
+            </a:extLst>
+          </p:cNvPr>
+          <p:cNvSpPr txBox="1"/>
+          <p:nvPr/>
+        </p:nvSpPr>
+        <p:spPr>
+          <a:xfrm>
+            <a:off x="4114802" y="4307326"/>
+            <a:ext cx="1168400" cy="307777"/>
+          </a:xfrm>
+          <a:prstGeom prst="rect">
+            <a:avLst/>
+          </a:prstGeom>
+          <a:noFill/>
+        </p:spPr>
+        <p:txBody>
+          <a:bodyPr wrap="square" rtlCol="0">
+            <a:spAutoFit/>
+          </a:bodyPr>
+          <a:lstStyle/>
+          <a:p>
+            <a:r>
+              <a:rPr lang="en-US" sz="1400" dirty="0"/>
+              <a:t>Unit matrix</a:t>
+            </a:r>
+          </a:p>
+        </p:txBody>
+      </p:sp>
     </p:spTree>
     <p:extLst>
       <p:ext uri="{BB962C8B-B14F-4D97-AF65-F5344CB8AC3E}">
@@ -9749,7 +10275,27 @@
                 <a:effectLst/>
                 <a:latin typeface="Arial" panose="020B0604020202020204" pitchFamily="34" charset="0"/>
               </a:rPr>
-              <a:t>connected graph</a:t>
+              <a:t>connected graph (</a:t>
+            </a:r>
+            <a:r>
+              <a:rPr lang="en-US" b="0" i="0" dirty="0">
+                <a:solidFill>
+                  <a:srgbClr val="000000"/>
+                </a:solidFill>
+                <a:effectLst/>
+                <a:latin typeface="Verdana" panose="020B0604030504040204" pitchFamily="34" charset="0"/>
+              </a:rPr>
+              <a:t>if any two nodes of the graph are connected by a path</a:t>
+            </a:r>
+            <a:r>
+              <a:rPr lang="en-US" b="1" i="0" dirty="0">
+                <a:solidFill>
+                  <a:srgbClr val="000000"/>
+                </a:solidFill>
+                <a:effectLst/>
+                <a:latin typeface="Arial" panose="020B0604020202020204" pitchFamily="34" charset="0"/>
+              </a:rPr>
+              <a:t>)</a:t>
             </a:r>
           </a:p>
           <a:p>
@@ -9883,8 +10429,8 @@
         </p:blipFill>
         <p:spPr>
           <a:xfrm>
-            <a:off x="6972300" y="3006958"/>
-            <a:ext cx="3600450" cy="2840144"/>
+            <a:off x="7507322" y="3429000"/>
+            <a:ext cx="3065427" cy="2418102"/>
           </a:xfrm>
           <a:prstGeom prst="rect">
             <a:avLst/>
